--- a/credit_card_fraud_detection.pptx
+++ b/credit_card_fraud_detection.pptx
@@ -3730,7 +3730,7 @@
                 <a:ea typeface="Calibri" pitchFamily="34" charset="-122"/>
                 <a:cs typeface="Calibri" pitchFamily="34" charset="-120"/>
               </a:rPr>
-              <a:t>Isolation Forest (F1=0.311, PR AUC=0.189) provides a no-label baseline. Adding labels with SMOTE + class-weighted RF pushes F1 to 0.907 — a 3× gain. Use IsoForest where labels are absent; supervised when available.</a:t>
+              <a:t>Isolation Forest (F1=0.311, PR AUC=0.189) provides a no-label baseline. Adding labels with class-weighted RF pushes F1 to 0.905 — a 3× gain. Use IsoForest where labels are absent; supervised when available.</a:t>
             </a:r>
             <a:endParaRPr lang="en-US" sz="1150" dirty="0"/>
           </a:p>
@@ -4684,7 +4684,7 @@
                 <a:ea typeface="Calibri" pitchFamily="34" charset="-122"/>
                 <a:cs typeface="Calibri" pitchFamily="34" charset="-120"/>
               </a:rPr>
-              <a:t> A model that flags nothing achieves 99.83% accuracy — catching zero fraud.  </a:t>
+              <a:t xml:space="preserve"> A model that flags nothing achieves 99.83% accuracy — catching zero fraud.  </a:t>
             </a:r>
             <a:r>
               <a:rPr lang="en-US" sz="1350" b="1" dirty="0">
@@ -4726,7 +4726,7 @@
                 <a:ea typeface="Calibri" pitchFamily="34" charset="-122"/>
                 <a:cs typeface="Calibri" pitchFamily="34" charset="-120"/>
               </a:rPr>
-              <a:t> Reaches 0.955 even with our unsupervised model — inflated by the 284,315-strong majority class.</a:t>
+              <a:t xml:space="preserve"> Reaches 0.955 even with our unsupervised model — inflated by the 284,315-strong majority class.</a:t>
             </a:r>
             <a:endParaRPr lang="en-US" sz="1350" dirty="0"/>
           </a:p>
@@ -4757,7 +4757,7 @@
                 <a:ea typeface="Calibri" pitchFamily="34" charset="-122"/>
                 <a:cs typeface="Calibri" pitchFamily="34" charset="-120"/>
               </a:rPr>
-              <a:t> Precision, Recall, F1, PR AUC, and MCC — all calibrated to the minority (fraud) class.</a:t>
+              <a:t xml:space="preserve"> Precision, Recall, F1, PR AUC, and MCC — all calibrated to the minority (fraud) class.</a:t>
             </a:r>
             <a:endParaRPr lang="en-US" sz="1350" dirty="0"/>
           </a:p>
@@ -9913,7 +9913,7 @@
                 <a:ea typeface="Calibri" pitchFamily="34" charset="-122"/>
                 <a:cs typeface="Calibri" pitchFamily="34" charset="-120"/>
               </a:rPr>
-              <a:t>99th-pct: </a:t>
+              <a:t xml:space="preserve">99th-pct: </a:t>
             </a:r>
             <a:r>
               <a:rPr lang="en-US" sz="1100" dirty="0">
@@ -10005,7 +10005,7 @@
                 <a:ea typeface="Calibri" pitchFamily="34" charset="-122"/>
                 <a:cs typeface="Calibri" pitchFamily="34" charset="-120"/>
               </a:rPr>
-              <a:t>F1-optimal: </a:t>
+              <a:t xml:space="preserve">F1-optimal: </a:t>
             </a:r>
             <a:r>
               <a:rPr lang="en-US" sz="1100" dirty="0">
@@ -11193,7 +11193,7 @@
                           <a:ea typeface="Calibri" pitchFamily="34" charset="-122"/>
                           <a:cs typeface="Calibri" pitchFamily="34" charset="-120"/>
                         </a:rPr>
-                        <a:t>0.898</a:t>
+                        <a:t>0.905</a:t>
                       </a:r>
                       <a:endParaRPr lang="en-US" sz="1100" dirty="0">
                         <a:latin typeface="Calibri" charset="0"/>
@@ -11258,7 +11258,7 @@
                           <a:ea typeface="Calibri" pitchFamily="34" charset="-122"/>
                           <a:cs typeface="Calibri" pitchFamily="34" charset="-120"/>
                         </a:rPr>
-                        <a:t>0.896</a:t>
+                        <a:t>0.903</a:t>
                       </a:r>
                       <a:endParaRPr lang="en-US" sz="1100" dirty="0">
                         <a:latin typeface="Calibri" charset="0"/>
@@ -11323,7 +11323,7 @@
                           <a:ea typeface="Calibri" pitchFamily="34" charset="-122"/>
                           <a:cs typeface="Calibri" pitchFamily="34" charset="-120"/>
                         </a:rPr>
-                        <a:t>0.829</a:t>
+                        <a:t>0.854</a:t>
                       </a:r>
                       <a:endParaRPr lang="en-US" sz="1100" dirty="0">
                         <a:latin typeface="Calibri" charset="0"/>
@@ -11460,7 +11460,7 @@
                           <a:ea typeface="Calibri" pitchFamily="34" charset="-122"/>
                           <a:cs typeface="Calibri" pitchFamily="34" charset="-120"/>
                         </a:rPr>
-                        <a:t>SMOTE + RF</a:t>
+                        <a:t>SMOTE + RF*</a:t>
                       </a:r>
                       <a:endParaRPr lang="en-US" sz="1100" dirty="0">
                         <a:latin typeface="Calibri" charset="0"/>
@@ -11525,7 +11525,7 @@
                           <a:ea typeface="Calibri" pitchFamily="34" charset="-122"/>
                           <a:cs typeface="Calibri" pitchFamily="34" charset="-120"/>
                         </a:rPr>
-                        <a:t>0.907</a:t>
+                        <a:t>—</a:t>
                       </a:r>
                       <a:endParaRPr lang="en-US" sz="1100" dirty="0">
                         <a:latin typeface="Calibri" charset="0"/>
@@ -11590,7 +11590,7 @@
                           <a:ea typeface="Calibri" pitchFamily="34" charset="-122"/>
                           <a:cs typeface="Calibri" pitchFamily="34" charset="-120"/>
                         </a:rPr>
-                        <a:t>0.904</a:t>
+                        <a:t>—</a:t>
                       </a:r>
                       <a:endParaRPr lang="en-US" sz="1100" dirty="0">
                         <a:latin typeface="Calibri" charset="0"/>
@@ -11655,7 +11655,7 @@
                           <a:ea typeface="Calibri" pitchFamily="34" charset="-122"/>
                           <a:cs typeface="Calibri" pitchFamily="34" charset="-120"/>
                         </a:rPr>
-                        <a:t>0.876</a:t>
+                        <a:t>—</a:t>
                       </a:r>
                       <a:endParaRPr lang="en-US" sz="1100" dirty="0">
                         <a:latin typeface="Calibri" charset="0"/>
@@ -11720,7 +11720,7 @@
                           <a:ea typeface="Calibri" pitchFamily="34" charset="-122"/>
                           <a:cs typeface="Calibri" pitchFamily="34" charset="-120"/>
                         </a:rPr>
-                        <a:t>SMOTE</a:t>
+                        <a:t>Not run*</a:t>
                       </a:r>
                       <a:endParaRPr lang="en-US" sz="1100" dirty="0">
                         <a:latin typeface="Calibri" charset="0"/>
@@ -11814,7 +11814,7 @@
                 <a:ea typeface="Calibri" pitchFamily="34" charset="-122"/>
                 <a:cs typeface="Calibri" pitchFamily="34" charset="-120"/>
               </a:rPr>
-              <a:t>Key insight: </a:t>
+              <a:t xml:space="preserve">Key insight: </a:t>
             </a:r>
             <a:r>
               <a:rPr lang="en-US" sz="1250" dirty="0">
@@ -11825,7 +11825,7 @@
                 <a:ea typeface="Calibri" pitchFamily="34" charset="-122"/>
                 <a:cs typeface="Calibri" pitchFamily="34" charset="-120"/>
               </a:rPr>
-              <a:t>SMOTE oversampling + class_weight='balanced' brings F1 from 0.311 (unsupervised) to 0.907 — a 3× improvement when labels are available. The cost is requiring labelled training data, which may not exist at deployment.</a:t>
+              <a:t>class_weight='balanced' RF brings F1 from 0.311 (unsupervised) to 0.905 — a 3× gain when labels are available. *SMOTE variant requires imbalanced-learn (pip install imbalanced-learn). The cost is requiring labelled training data, which may not exist at deployment.</a:t>
             </a:r>
             <a:endParaRPr lang="en-US" sz="1250" dirty="0"/>
           </a:p>
@@ -12368,7 +12368,7 @@
                 <a:ea typeface="Calibri" pitchFamily="34" charset="-122"/>
                 <a:cs typeface="Calibri" pitchFamily="34" charset="-120"/>
               </a:rPr>
-              <a:t>disc_power = 0.391   |sep| = 8.94σ</a:t>
+              <a:t>disc_power = 0.449   |sep| = 7.79σ</a:t>
             </a:r>
             <a:endParaRPr lang="en-US" sz="1200" dirty="0"/>
           </a:p>

--- a/credit_card_fraud_detection.pptx
+++ b/credit_card_fraud_detection.pptx
@@ -9,6 +9,7 @@
   </p:notesMasterIdLst>
   <p:sldIdLst>
     <p:sldId id="256" r:id="rId2"/>
+    <p:sldId id="268" r:id="rId19"/>
     <p:sldId id="257" r:id="rId3"/>
     <p:sldId id="258" r:id="rId4"/>
     <p:sldId id="259" r:id="rId5"/>
@@ -4037,6 +4038,718 @@
               <a:t>Walk-forward CV over 8-hour blocks reveals IsoForest PR AUC swings from 0.018 to 0.585 across folds — effectively unstable. RF balanced stays in the 0.74–0.82 band. PSI drift monitoring across the top-5 discriminating features provides an early retrain signal.</a:t>
             </a:r>
             <a:endParaRPr lang="en-US" sz="1150" dirty="0"/>
+          </a:p>
+        </p:txBody>
+      </p:sp>
+    </p:spTree>
+  </p:cSld>
+  <p:clrMapOvr>
+    <a:masterClrMapping/>
+  </p:clrMapOvr>
+</p:sld>
+</file>
+
+<file path=ppt/slides/slide13.xml><?xml version="1.0" encoding="utf-8"?>
+<p:sld xmlns:a="http://schemas.openxmlformats.org/drawingml/2006/main" xmlns:r="http://schemas.openxmlformats.org/officeDocument/2006/relationships" xmlns:p="http://schemas.openxmlformats.org/presentationml/2006/main">
+  <p:cSld name="Slide 1b">
+    <p:bg>
+      <p:bgPr>
+        <a:solidFill>
+          <a:srgbClr val="EDF0FB"/>
+        </a:solidFill>
+        <a:effectLst/>
+      </p:bgPr>
+    </p:bg>
+    <p:spTree>
+      <p:nvGrpSpPr>
+        <p:cNvPr id="1" name=""/>
+        <p:cNvGrpSpPr/>
+        <p:nvPr/>
+      </p:nvGrpSpPr>
+      <p:grpSpPr>
+        <a:xfrm>
+          <a:off x="0" y="0"/>
+          <a:ext cx="0" cy="0"/>
+          <a:chOff x="0" y="0"/>
+          <a:chExt cx="0" cy="0"/>
+        </a:xfrm>
+      </p:grpSpPr>
+      <p:sp>
+        <p:nvSpPr>
+          <p:cNvPr id="2" name="Shape 0"/>
+          <p:cNvSpPr/>
+          <p:nvPr/>
+        </p:nvSpPr>
+        <p:spPr>
+          <a:xfrm>
+            <a:off x="0" y="0"/>
+            <a:ext cx="9144000" cy="566928"/>
+          </a:xfrm>
+          <a:prstGeom prst="rect">
+            <a:avLst/>
+          </a:prstGeom>
+          <a:solidFill>
+            <a:srgbClr val="1E2761"/>
+          </a:solidFill>
+          <a:ln w="12700">
+            <a:solidFill>
+              <a:srgbClr val="1E2761"/>
+            </a:solidFill>
+            <a:prstDash val="solid"/>
+          </a:ln>
+        </p:spPr>
+        <p:txBody>
+          <a:bodyPr/>
+          <a:lstStyle/>
+          <a:p>
+            <a:endParaRPr lang="en-US"/>
+          </a:p>
+        </p:txBody>
+      </p:sp>
+      <p:sp>
+        <p:nvSpPr>
+          <p:cNvPr id="3" name="Shape 1"/>
+          <p:cNvSpPr/>
+          <p:nvPr/>
+        </p:nvSpPr>
+        <p:spPr>
+          <a:xfrm>
+            <a:off x="0" y="566928"/>
+            <a:ext cx="82296" cy="4576572"/>
+          </a:xfrm>
+          <a:prstGeom prst="rect">
+            <a:avLst/>
+          </a:prstGeom>
+          <a:solidFill>
+            <a:srgbClr val="C0392B"/>
+          </a:solidFill>
+          <a:ln w="12700">
+            <a:solidFill>
+              <a:srgbClr val="C0392B"/>
+            </a:solidFill>
+            <a:prstDash val="solid"/>
+          </a:ln>
+        </p:spPr>
+        <p:txBody>
+          <a:bodyPr/>
+          <a:lstStyle/>
+          <a:p>
+            <a:endParaRPr lang="en-US"/>
+          </a:p>
+        </p:txBody>
+      </p:sp>
+      <p:sp>
+        <p:nvSpPr>
+          <p:cNvPr id="4" name="Text 2"/>
+          <p:cNvSpPr/>
+          <p:nvPr/>
+        </p:nvSpPr>
+        <p:spPr>
+          <a:xfrm>
+            <a:off x="201168" y="0"/>
+            <a:ext cx="8778240" cy="566928"/>
+          </a:xfrm>
+          <a:prstGeom prst="rect">
+            <a:avLst/>
+          </a:prstGeom>
+          <a:noFill/>
+          <a:ln/>
+        </p:spPr>
+        <p:txBody>
+          <a:bodyPr wrap="square" lIns="0" tIns="0" rIns="0" bIns="0" rtlCol="0" anchor="ctr"/>
+          <a:lstStyle/>
+          <a:p>
+            <a:pPr marL="0" indent="0">
+              <a:buNone/>
+            </a:pPr>
+            <a:r>
+              <a:rPr lang="en-US" sz="2000" b="1" dirty="0">
+                <a:solidFill>
+                  <a:srgbClr val="FFFFFF"/>
+                </a:solidFill>
+                <a:latin typeface="Calibri" pitchFamily="34" charset="0"/>
+                <a:ea typeface="Calibri" pitchFamily="34" charset="-122"/>
+                <a:cs typeface="Calibri" pitchFamily="34" charset="-120"/>
+              </a:rPr>
+              <a:t>The Business Questions</a:t>
+            </a:r>
+            <a:endParaRPr lang="en-US" sz="2000" dirty="0"/>
+          </a:p>
+        </p:txBody>
+      </p:sp>
+      <p:sp>
+        <p:nvSpPr>
+          <p:cNvPr id="5" name="Shape 3"/>
+          <p:cNvSpPr/>
+          <p:nvPr/>
+        </p:nvSpPr>
+        <p:spPr>
+          <a:xfrm>
+            <a:off x="228600" y="749808"/>
+            <a:ext cx="2514600" cy="1325880"/>
+          </a:xfrm>
+          <a:prstGeom prst="rect">
+            <a:avLst/>
+          </a:prstGeom>
+          <a:solidFill>
+            <a:srgbClr val="FFFFFF"/>
+          </a:solidFill>
+          <a:ln w="9525">
+            <a:solidFill>
+              <a:srgbClr val="C5CFE8"/>
+            </a:solidFill>
+            <a:prstDash val="solid"/>
+          </a:ln>
+          <a:effectLst>
+            <a:outerShdw blurRad="63500" dist="25400" dir="8100000" algn="bl" rotWithShape="0">
+              <a:srgbClr val="000000">
+                <a:alpha val="10000"/>
+              </a:srgbClr>
+            </a:outerShdw>
+          </a:effectLst>
+        </p:spPr>
+        <p:txBody>
+          <a:bodyPr/>
+          <a:lstStyle/>
+          <a:p>
+            <a:endParaRPr lang="en-US"/>
+          </a:p>
+        </p:txBody>
+      </p:sp>
+      <p:sp>
+        <p:nvSpPr>
+          <p:cNvPr id="6" name="Text 4"/>
+          <p:cNvSpPr/>
+          <p:nvPr/>
+        </p:nvSpPr>
+        <p:spPr>
+          <a:xfrm>
+            <a:off x="228600" y="822960"/>
+            <a:ext cx="2514600" cy="777240"/>
+          </a:xfrm>
+          <a:prstGeom prst="rect">
+            <a:avLst/>
+          </a:prstGeom>
+          <a:noFill/>
+          <a:ln/>
+        </p:spPr>
+        <p:txBody>
+          <a:bodyPr wrap="square" rtlCol="0" anchor="ctr"/>
+          <a:lstStyle/>
+          <a:p>
+            <a:pPr marL="0" indent="0" algn="ctr">
+              <a:buNone/>
+            </a:pPr>
+            <a:r>
+              <a:rPr lang="en-US" sz="3800" b="1" dirty="0">
+                <a:solidFill>
+                  <a:srgbClr val="1E2761"/>
+                </a:solidFill>
+                <a:latin typeface="Calibri" pitchFamily="34" charset="0"/>
+                <a:ea typeface="Calibri" pitchFamily="34" charset="-122"/>
+                <a:cs typeface="Calibri" pitchFamily="34" charset="-120"/>
+              </a:rPr>
+              <a:t>Q1</a:t>
+            </a:r>
+            <a:endParaRPr lang="en-US" sz="3800" dirty="0"/>
+          </a:p>
+        </p:txBody>
+      </p:sp>
+      <p:sp>
+        <p:nvSpPr>
+          <p:cNvPr id="7" name="Text 5"/>
+          <p:cNvSpPr/>
+          <p:nvPr/>
+        </p:nvSpPr>
+        <p:spPr>
+          <a:xfrm>
+            <a:off x="228600" y="1572768"/>
+            <a:ext cx="2514600" cy="411480"/>
+          </a:xfrm>
+          <a:prstGeom prst="rect">
+            <a:avLst/>
+          </a:prstGeom>
+          <a:noFill/>
+          <a:ln/>
+        </p:spPr>
+        <p:txBody>
+          <a:bodyPr wrap="square" rtlCol="0" anchor="ctr"/>
+          <a:lstStyle/>
+          <a:p>
+            <a:pPr marL="0" indent="0" algn="ctr">
+              <a:buNone/>
+            </a:pPr>
+            <a:r>
+              <a:rPr lang="en-US" sz="1100" dirty="0">
+                <a:solidFill>
+                  <a:srgbClr val="64748B"/>
+                </a:solidFill>
+                <a:latin typeface="Calibri" pitchFamily="34" charset="0"/>
+                <a:ea typeface="Calibri" pitchFamily="34" charset="-122"/>
+                <a:cs typeface="Calibri" pitchFamily="34" charset="-120"/>
+              </a:rPr>
+              <a:t>fraud patterns, no labels</a:t>
+            </a:r>
+            <a:endParaRPr lang="en-US" sz="1100" dirty="0"/>
+          </a:p>
+        </p:txBody>
+      </p:sp>
+      <p:sp>
+        <p:nvSpPr>
+          <p:cNvPr id="8" name="Shape 6"/>
+          <p:cNvSpPr/>
+          <p:nvPr/>
+        </p:nvSpPr>
+        <p:spPr>
+          <a:xfrm>
+            <a:off x="3200400" y="749808"/>
+            <a:ext cx="2514600" cy="1325880"/>
+          </a:xfrm>
+          <a:prstGeom prst="rect">
+            <a:avLst/>
+          </a:prstGeom>
+          <a:solidFill>
+            <a:srgbClr val="FFFFFF"/>
+          </a:solidFill>
+          <a:ln w="9525">
+            <a:solidFill>
+              <a:srgbClr val="C5CFE8"/>
+            </a:solidFill>
+            <a:prstDash val="solid"/>
+          </a:ln>
+          <a:effectLst>
+            <a:outerShdw blurRad="63500" dist="25400" dir="8100000" algn="bl" rotWithShape="0">
+              <a:srgbClr val="000000">
+                <a:alpha val="10000"/>
+              </a:srgbClr>
+            </a:outerShdw>
+          </a:effectLst>
+        </p:spPr>
+        <p:txBody>
+          <a:bodyPr/>
+          <a:lstStyle/>
+          <a:p>
+            <a:endParaRPr lang="en-US"/>
+          </a:p>
+        </p:txBody>
+      </p:sp>
+      <p:sp>
+        <p:nvSpPr>
+          <p:cNvPr id="9" name="Text 7"/>
+          <p:cNvSpPr/>
+          <p:nvPr/>
+        </p:nvSpPr>
+        <p:spPr>
+          <a:xfrm>
+            <a:off x="3200400" y="822960"/>
+            <a:ext cx="2514600" cy="777240"/>
+          </a:xfrm>
+          <a:prstGeom prst="rect">
+            <a:avLst/>
+          </a:prstGeom>
+          <a:noFill/>
+          <a:ln/>
+        </p:spPr>
+        <p:txBody>
+          <a:bodyPr wrap="square" rtlCol="0" anchor="ctr"/>
+          <a:lstStyle/>
+          <a:p>
+            <a:pPr marL="0" indent="0" algn="ctr">
+              <a:buNone/>
+            </a:pPr>
+            <a:r>
+              <a:rPr lang="en-US" sz="3800" b="1" dirty="0">
+                <a:solidFill>
+                  <a:srgbClr val="C0392B"/>
+                </a:solidFill>
+                <a:latin typeface="Calibri" pitchFamily="34" charset="0"/>
+                <a:ea typeface="Calibri" pitchFamily="34" charset="-122"/>
+                <a:cs typeface="Calibri" pitchFamily="34" charset="-120"/>
+              </a:rPr>
+              <a:t>Q2</a:t>
+            </a:r>
+            <a:endParaRPr lang="en-US" sz="3800" dirty="0"/>
+          </a:p>
+        </p:txBody>
+      </p:sp>
+      <p:sp>
+        <p:nvSpPr>
+          <p:cNvPr id="10" name="Text 8"/>
+          <p:cNvSpPr/>
+          <p:nvPr/>
+        </p:nvSpPr>
+        <p:spPr>
+          <a:xfrm>
+            <a:off x="3200400" y="1572768"/>
+            <a:ext cx="2514600" cy="411480"/>
+          </a:xfrm>
+          <a:prstGeom prst="rect">
+            <a:avLst/>
+          </a:prstGeom>
+          <a:noFill/>
+          <a:ln/>
+        </p:spPr>
+        <p:txBody>
+          <a:bodyPr wrap="square" rtlCol="0" anchor="ctr"/>
+          <a:lstStyle/>
+          <a:p>
+            <a:pPr marL="0" indent="0" algn="ctr">
+              <a:buNone/>
+            </a:pPr>
+            <a:r>
+              <a:rPr lang="en-US" sz="1100" dirty="0">
+                <a:solidFill>
+                  <a:srgbClr val="64748B"/>
+                </a:solidFill>
+                <a:latin typeface="Calibri" pitchFamily="34" charset="0"/>
+                <a:ea typeface="Calibri" pitchFamily="34" charset="-122"/>
+                <a:cs typeface="Calibri" pitchFamily="34" charset="-120"/>
+              </a:rPr>
+              <a:t>which signals indicate fraud</a:t>
+            </a:r>
+            <a:endParaRPr lang="en-US" sz="1100" dirty="0"/>
+          </a:p>
+        </p:txBody>
+      </p:sp>
+      <p:sp>
+        <p:nvSpPr>
+          <p:cNvPr id="11" name="Shape 9"/>
+          <p:cNvSpPr/>
+          <p:nvPr/>
+        </p:nvSpPr>
+        <p:spPr>
+          <a:xfrm>
+            <a:off x="6172200" y="749808"/>
+            <a:ext cx="2514600" cy="1325880"/>
+          </a:xfrm>
+          <a:prstGeom prst="rect">
+            <a:avLst/>
+          </a:prstGeom>
+          <a:solidFill>
+            <a:srgbClr val="FFFFFF"/>
+          </a:solidFill>
+          <a:ln w="9525">
+            <a:solidFill>
+              <a:srgbClr val="C5CFE8"/>
+            </a:solidFill>
+            <a:prstDash val="solid"/>
+          </a:ln>
+          <a:effectLst>
+            <a:outerShdw blurRad="63500" dist="25400" dir="8100000" algn="bl" rotWithShape="0">
+              <a:srgbClr val="000000">
+                <a:alpha val="10000"/>
+              </a:srgbClr>
+            </a:outerShdw>
+          </a:effectLst>
+        </p:spPr>
+        <p:txBody>
+          <a:bodyPr/>
+          <a:lstStyle/>
+          <a:p>
+            <a:endParaRPr lang="en-US"/>
+          </a:p>
+        </p:txBody>
+      </p:sp>
+      <p:sp>
+        <p:nvSpPr>
+          <p:cNvPr id="12" name="Text 10"/>
+          <p:cNvSpPr/>
+          <p:nvPr/>
+        </p:nvSpPr>
+        <p:spPr>
+          <a:xfrm>
+            <a:off x="6172200" y="822960"/>
+            <a:ext cx="2514600" cy="777240"/>
+          </a:xfrm>
+          <a:prstGeom prst="rect">
+            <a:avLst/>
+          </a:prstGeom>
+          <a:noFill/>
+          <a:ln/>
+        </p:spPr>
+        <p:txBody>
+          <a:bodyPr wrap="square" rtlCol="0" anchor="ctr"/>
+          <a:lstStyle/>
+          <a:p>
+            <a:pPr marL="0" indent="0" algn="ctr">
+              <a:buNone/>
+            </a:pPr>
+            <a:r>
+              <a:rPr lang="en-US" sz="3800" b="1" dirty="0">
+                <a:solidFill>
+                  <a:srgbClr val="E67E22"/>
+                </a:solidFill>
+                <a:latin typeface="Calibri" pitchFamily="34" charset="0"/>
+                <a:ea typeface="Calibri" pitchFamily="34" charset="-122"/>
+                <a:cs typeface="Calibri" pitchFamily="34" charset="-120"/>
+              </a:rPr>
+              <a:t>Q3</a:t>
+            </a:r>
+            <a:endParaRPr lang="en-US" sz="3800" dirty="0"/>
+          </a:p>
+        </p:txBody>
+      </p:sp>
+      <p:sp>
+        <p:nvSpPr>
+          <p:cNvPr id="13" name="Text 11"/>
+          <p:cNvSpPr/>
+          <p:nvPr/>
+        </p:nvSpPr>
+        <p:spPr>
+          <a:xfrm>
+            <a:off x="6172200" y="1572768"/>
+            <a:ext cx="2514600" cy="411480"/>
+          </a:xfrm>
+          <a:prstGeom prst="rect">
+            <a:avLst/>
+          </a:prstGeom>
+          <a:noFill/>
+          <a:ln/>
+        </p:spPr>
+        <p:txBody>
+          <a:bodyPr wrap="square" rtlCol="0" anchor="ctr"/>
+          <a:lstStyle/>
+          <a:p>
+            <a:pPr marL="0" indent="0" algn="ctr">
+              <a:buNone/>
+            </a:pPr>
+            <a:r>
+              <a:rPr lang="en-US" sz="1100" dirty="0">
+                <a:solidFill>
+                  <a:srgbClr val="64748B"/>
+                </a:solidFill>
+                <a:latin typeface="Calibri" pitchFamily="34" charset="0"/>
+                <a:ea typeface="Calibri" pitchFamily="34" charset="-122"/>
+                <a:cs typeface="Calibri" pitchFamily="34" charset="-120"/>
+              </a:rPr>
+              <a:t>model viability over time</a:t>
+            </a:r>
+            <a:endParaRPr lang="en-US" sz="1100" dirty="0"/>
+          </a:p>
+        </p:txBody>
+      </p:sp>
+      <p:sp>
+        <p:nvSpPr>
+          <p:cNvPr id="14" name="Shape 12"/>
+          <p:cNvSpPr/>
+          <p:nvPr/>
+        </p:nvSpPr>
+        <p:spPr>
+          <a:xfrm>
+            <a:off x="228600" y="2286000"/>
+            <a:ext cx="8686800" cy="2633472"/>
+          </a:xfrm>
+          <a:prstGeom prst="rect">
+            <a:avLst/>
+          </a:prstGeom>
+          <a:solidFill>
+            <a:srgbClr val="FFFFFF"/>
+          </a:solidFill>
+          <a:ln w="9525">
+            <a:solidFill>
+              <a:srgbClr val="C5CFE8"/>
+            </a:solidFill>
+            <a:prstDash val="solid"/>
+          </a:ln>
+          <a:effectLst>
+            <a:outerShdw blurRad="63500" dist="25400" dir="8100000" algn="bl" rotWithShape="0">
+              <a:srgbClr val="000000">
+                <a:alpha val="10000"/>
+              </a:srgbClr>
+            </a:outerShdw>
+          </a:effectLst>
+        </p:spPr>
+        <p:txBody>
+          <a:bodyPr/>
+          <a:lstStyle/>
+          <a:p>
+            <a:endParaRPr lang="en-US"/>
+          </a:p>
+        </p:txBody>
+      </p:sp>
+      <p:sp>
+        <p:nvSpPr>
+          <p:cNvPr id="15" name="Shape 13"/>
+          <p:cNvSpPr/>
+          <p:nvPr/>
+        </p:nvSpPr>
+        <p:spPr>
+          <a:xfrm>
+            <a:off x="228600" y="2286000"/>
+            <a:ext cx="64008" cy="2633472"/>
+          </a:xfrm>
+          <a:prstGeom prst="rect">
+            <a:avLst/>
+          </a:prstGeom>
+          <a:solidFill>
+            <a:srgbClr val="1E2761"/>
+          </a:solidFill>
+          <a:ln w="12700">
+            <a:solidFill>
+              <a:srgbClr val="1E2761"/>
+            </a:solidFill>
+            <a:prstDash val="solid"/>
+          </a:ln>
+        </p:spPr>
+        <p:txBody>
+          <a:bodyPr/>
+          <a:lstStyle/>
+          <a:p>
+            <a:endParaRPr lang="en-US"/>
+          </a:p>
+        </p:txBody>
+      </p:sp>
+      <p:sp>
+        <p:nvSpPr>
+          <p:cNvPr id="16" name="Text 14"/>
+          <p:cNvSpPr/>
+          <p:nvPr/>
+        </p:nvSpPr>
+        <p:spPr>
+          <a:xfrm>
+            <a:off x="411480" y="2395728"/>
+            <a:ext cx="8321040" cy="347472"/>
+          </a:xfrm>
+          <a:prstGeom prst="rect">
+            <a:avLst/>
+          </a:prstGeom>
+          <a:noFill/>
+          <a:ln/>
+        </p:spPr>
+        <p:txBody>
+          <a:bodyPr wrap="square" rtlCol="0" anchor="ctr"/>
+          <a:lstStyle/>
+          <a:p>
+            <a:pPr marL="0" indent="0">
+              <a:buNone/>
+            </a:pPr>
+            <a:r>
+              <a:rPr lang="en-US" sz="1500" b="1" dirty="0">
+                <a:solidFill>
+                  <a:srgbClr val="1E2761"/>
+                </a:solidFill>
+                <a:latin typeface="Calibri" pitchFamily="34" charset="0"/>
+                <a:ea typeface="Calibri" pitchFamily="34" charset="-122"/>
+                <a:cs typeface="Calibri" pitchFamily="34" charset="-120"/>
+              </a:rPr>
+              <a:t>What each question asks, in full</a:t>
+            </a:r>
+            <a:endParaRPr lang="en-US" sz="1500" dirty="0"/>
+          </a:p>
+        </p:txBody>
+      </p:sp>
+      <p:sp>
+        <p:nvSpPr>
+          <p:cNvPr id="17" name="Text 15"/>
+          <p:cNvSpPr/>
+          <p:nvPr/>
+        </p:nvSpPr>
+        <p:spPr>
+          <a:xfrm>
+            <a:off x="411480" y="2788920"/>
+            <a:ext cx="8229600" cy="2011680"/>
+          </a:xfrm>
+          <a:prstGeom prst="rect">
+            <a:avLst/>
+          </a:prstGeom>
+          <a:noFill/>
+          <a:ln/>
+        </p:spPr>
+        <p:txBody>
+          <a:bodyPr wrap="square" rtlCol="0" anchor="ctr"/>
+          <a:lstStyle/>
+          <a:p>
+            <a:pPr marL="0" indent="0">
+              <a:lnSpc>
+                <a:spcPct val="135000"/>
+              </a:lnSpc>
+              <a:buNone/>
+            </a:pPr>
+            <a:r>
+              <a:rPr lang="en-US" sz="1350" b="1" dirty="0">
+                <a:solidFill>
+                  <a:srgbClr val="1A1A2E"/>
+                </a:solidFill>
+                <a:latin typeface="Calibri" pitchFamily="34" charset="0"/>
+                <a:ea typeface="Calibri" pitchFamily="34" charset="-122"/>
+                <a:cs typeface="Calibri" pitchFamily="34" charset="-120"/>
+              </a:rPr>
+              <a:t>Q1 — Pattern detection without labels:</a:t>
+            </a:r>
+            <a:r>
+              <a:rPr lang="en-US" sz="1350" dirty="0">
+                <a:solidFill>
+                  <a:srgbClr val="1A1A2E"/>
+                </a:solidFill>
+                <a:latin typeface="Calibri" pitchFamily="34" charset="0"/>
+                <a:ea typeface="Calibri" pitchFamily="34" charset="-122"/>
+                <a:cs typeface="Calibri" pitchFamily="34" charset="-120"/>
+              </a:rPr>
+              <a:t xml:space="preserve"> Can fraud patterns and the transactions behind them be found in unlabeled data, using anomaly behavior alone rather than supervision?</a:t>
+            </a:r>
+            <a:endParaRPr lang="en-US" sz="1350" dirty="0"/>
+          </a:p>
+          <a:p>
+            <a:pPr marL="0" indent="0">
+              <a:lnSpc>
+                <a:spcPct val="135000"/>
+              </a:lnSpc>
+              <a:buNone/>
+            </a:pPr>
+            <a:r>
+              <a:rPr lang="en-US" sz="1350" b="1" dirty="0">
+                <a:solidFill>
+                  <a:srgbClr val="1A1A2E"/>
+                </a:solidFill>
+                <a:latin typeface="Calibri" pitchFamily="34" charset="0"/>
+                <a:ea typeface="Calibri" pitchFamily="34" charset="-122"/>
+                <a:cs typeface="Calibri" pitchFamily="34" charset="-120"/>
+              </a:rPr>
+              <a:t>Q2 — Labels that signal fraud:</a:t>
+            </a:r>
+            <a:r>
+              <a:rPr lang="en-US" sz="1350" dirty="0">
+                <a:solidFill>
+                  <a:srgbClr val="1A1A2E"/>
+                </a:solidFill>
+                <a:latin typeface="Calibri" pitchFamily="34" charset="0"/>
+                <a:ea typeface="Calibri" pitchFamily="34" charset="-122"/>
+                <a:cs typeface="Calibri" pitchFamily="34" charset="-120"/>
+              </a:rPr>
+              <a:t xml:space="preserve"> Once labels exist, which of the 28 anonymized features actually separate fraud from non-fraud — determined objectively, not assumed?</a:t>
+            </a:r>
+            <a:endParaRPr lang="en-US" sz="1350" dirty="0"/>
+          </a:p>
+          <a:p>
+            <a:pPr marL="0" indent="0">
+              <a:lnSpc>
+                <a:spcPct val="135000"/>
+              </a:lnSpc>
+              <a:buNone/>
+            </a:pPr>
+            <a:r>
+              <a:rPr lang="en-US" sz="1350" b="1" dirty="0">
+                <a:solidFill>
+                  <a:srgbClr val="1A1A2E"/>
+                </a:solidFill>
+                <a:latin typeface="Calibri" pitchFamily="34" charset="0"/>
+                <a:ea typeface="Calibri" pitchFamily="34" charset="-122"/>
+                <a:cs typeface="Calibri" pitchFamily="34" charset="-120"/>
+              </a:rPr>
+              <a:t>Q3 — Viability and longevity:</a:t>
+            </a:r>
+            <a:r>
+              <a:rPr lang="en-US" sz="1350" dirty="0">
+                <a:solidFill>
+                  <a:srgbClr val="1A1A2E"/>
+                </a:solidFill>
+                <a:latin typeface="Calibri" pitchFamily="34" charset="0"/>
+                <a:ea typeface="Calibri" pitchFamily="34" charset="-122"/>
+                <a:cs typeface="Calibri" pitchFamily="34" charset="-120"/>
+              </a:rPr>
+              <a:t xml:space="preserve"> Would a fraud-detection model trained today still be trustworthy weeks or months later, as fraud patterns shift over time?</a:t>
+            </a:r>
+            <a:endParaRPr lang="en-US" sz="1350" dirty="0"/>
           </a:p>
         </p:txBody>
       </p:sp>
